--- a/Ch19_German_Composers.pptx
+++ b/Ch19_German_Composers.pptx
@@ -6401,7 +6401,7 @@
                 <a:ea typeface="Calibri" pitchFamily="34" charset="-122"/>
                 <a:cs typeface="Calibri" pitchFamily="34" charset="-120"/>
               </a:rPr>
-              <a:t>youtube.com/watch?v=V1PaFr3wlQs</a:t>
+              <a:t>youtube.com/watch?v=Dh2vPuqXw84</a:t>
             </a:r>
             <a:endParaRPr lang="en-US" sz="1400" dirty="0"/>
           </a:p>
@@ -6435,7 +6435,7 @@
                 <a:ea typeface="Calibri" pitchFamily="34" charset="-122"/>
                 <a:cs typeface="Calibri" pitchFamily="34" charset="-120"/>
               </a:rPr>
-              <a:t>youtube.com/watch?v=_mjofPMWbAE</a:t>
+              <a:t>youtube.com/watch?v=_xhThihIIC4</a:t>
             </a:r>
             <a:endParaRPr lang="en-US" sz="1400" dirty="0"/>
           </a:p>
@@ -6469,7 +6469,7 @@
                 <a:ea typeface="Calibri" pitchFamily="34" charset="-122"/>
                 <a:cs typeface="Calibri" pitchFamily="34" charset="-120"/>
               </a:rPr>
-              <a:t>youtube.com/watch?v=fNU-cEwFnOo</a:t>
+              <a:t>youtube.com/watch?v=Z8Dpe0gjesg</a:t>
             </a:r>
             <a:endParaRPr lang="en-US" sz="1400" dirty="0"/>
           </a:p>
@@ -6503,7 +6503,7 @@
                 <a:ea typeface="Calibri" pitchFamily="34" charset="-122"/>
                 <a:cs typeface="Calibri" pitchFamily="34" charset="-120"/>
               </a:rPr>
-              <a:t>youtube.com/watch?v=aaCsAmr6bj4</a:t>
+              <a:t>youtube.com/watch?v=7oj63klgeEg</a:t>
             </a:r>
             <a:endParaRPr lang="en-US" sz="1400" dirty="0"/>
           </a:p>
@@ -6537,7 +6537,7 @@
                 <a:ea typeface="Calibri" pitchFamily="34" charset="-122"/>
                 <a:cs typeface="Calibri" pitchFamily="34" charset="-120"/>
               </a:rPr>
-              <a:t>youtube.com/watch?v=49IOKMagQ3c</a:t>
+              <a:t>youtube.com/watch?v=LHjbRMIIhuM</a:t>
             </a:r>
             <a:endParaRPr lang="en-US" sz="1400" dirty="0"/>
           </a:p>
@@ -6571,7 +6571,7 @@
                 <a:ea typeface="Calibri" pitchFamily="34" charset="-122"/>
                 <a:cs typeface="Calibri" pitchFamily="34" charset="-120"/>
               </a:rPr>
-              <a:t>youtube.com/watch?v=MiJnSHKaOsc</a:t>
+              <a:t>youtube.com/watch?v=xRImsDQbaYY</a:t>
             </a:r>
             <a:endParaRPr lang="en-US" sz="1400" dirty="0"/>
           </a:p>
@@ -6605,7 +6605,7 @@
                 <a:ea typeface="Calibri" pitchFamily="34" charset="-122"/>
                 <a:cs typeface="Calibri" pitchFamily="34" charset="-120"/>
               </a:rPr>
-              <a:t>youtube.com/watch?v=e5Ib9FjPfJk</a:t>
+              <a:t>youtube.com/watch?v=jQ9lz1fDkug</a:t>
             </a:r>
             <a:endParaRPr lang="en-US" sz="1400" dirty="0"/>
           </a:p>
